--- a/lesson3/src/main/kotlin/ru/tbank/education/school/lesson3/tasks/5_o2/sem3.pptx
+++ b/lesson3/src/main/kotlin/ru/tbank/education/school/lesson3/tasks/5_o2/sem3.pptx
@@ -5,7 +5,7 @@
     <p:sldMasterId id="2147483648" r:id="rId1"/>
   </p:sldMasterIdLst>
   <p:notesMasterIdLst>
-    <p:notesMasterId r:id="rId10"/>
+    <p:notesMasterId r:id="rId11"/>
   </p:notesMasterIdLst>
   <p:sldIdLst>
     <p:sldId id="835" r:id="rId2"/>
@@ -16,14 +16,15 @@
     <p:sldId id="836" r:id="rId7"/>
     <p:sldId id="841" r:id="rId8"/>
     <p:sldId id="842" r:id="rId9"/>
+    <p:sldId id="846" r:id="rId10"/>
   </p:sldIdLst>
   <p:sldSz cx="19799300" cy="11160125"/>
   <p:notesSz cx="19799300" cy="11160125"/>
   <p:embeddedFontLst>
     <p:embeddedFont>
-      <p:font typeface="Tinkoff Sans" panose="02000506050000020004" pitchFamily="2" charset="0"/>
-      <p:regular r:id="rId11"/>
-      <p:bold r:id="rId12"/>
+      <p:font typeface="Tinkoff Sans" panose="02000806050000020004" pitchFamily="2" charset="0"/>
+      <p:regular r:id="rId12"/>
+      <p:bold r:id="rId13"/>
     </p:embeddedFont>
   </p:embeddedFontLst>
   <p:defaultTextStyle>
@@ -301,6 +302,7 @@
             <p14:sldId id="836"/>
             <p14:sldId id="841"/>
             <p14:sldId id="842"/>
+            <p14:sldId id="846"/>
           </p14:sldIdLst>
         </p14:section>
       </p14:sectionLst>
@@ -1516,6 +1518,135 @@
     <p:extLst>
       <p:ext uri="{BB962C8B-B14F-4D97-AF65-F5344CB8AC3E}">
         <p14:creationId xmlns:p14="http://schemas.microsoft.com/office/powerpoint/2010/main" val="471450731"/>
+      </p:ext>
+    </p:extLst>
+  </p:cSld>
+  <p:clrMapOvr>
+    <a:masterClrMapping/>
+  </p:clrMapOvr>
+</p:notes>
+</file>
+
+<file path=ppt/notesSlides/notesSlide9.xml><?xml version="1.0" encoding="utf-8"?>
+<p:notes xmlns:a="http://schemas.openxmlformats.org/drawingml/2006/main" xmlns:r="http://schemas.openxmlformats.org/officeDocument/2006/relationships" xmlns:p="http://schemas.openxmlformats.org/presentationml/2006/main">
+  <p:cSld>
+    <p:spTree>
+      <p:nvGrpSpPr>
+        <p:cNvPr id="1" name="">
+          <a:extLst>
+            <a:ext uri="{FF2B5EF4-FFF2-40B4-BE49-F238E27FC236}">
+              <a16:creationId xmlns:a16="http://schemas.microsoft.com/office/drawing/2014/main" id="{91EDEC83-D75D-5E0C-9526-FBCC789E8B1F}"/>
+            </a:ext>
+          </a:extLst>
+        </p:cNvPr>
+        <p:cNvGrpSpPr/>
+        <p:nvPr/>
+      </p:nvGrpSpPr>
+      <p:grpSpPr bwMode="auto">
+        <a:xfrm>
+          <a:off x="0" y="0"/>
+          <a:ext cx="0" cy="0"/>
+          <a:chOff x="0" y="0"/>
+          <a:chExt cx="0" cy="0"/>
+        </a:xfrm>
+      </p:grpSpPr>
+      <p:sp>
+        <p:nvSpPr>
+          <p:cNvPr id="1860409768" name="Образ слайда 1">
+            <a:extLst>
+              <a:ext uri="{FF2B5EF4-FFF2-40B4-BE49-F238E27FC236}">
+                <a16:creationId xmlns:a16="http://schemas.microsoft.com/office/drawing/2014/main" id="{37A7F8A7-2D6C-8D84-3EAC-C3276D5FE22E}"/>
+              </a:ext>
+            </a:extLst>
+          </p:cNvPr>
+          <p:cNvSpPr>
+            <a:spLocks noGrp="1" noRot="1" noChangeAspect="1"/>
+          </p:cNvSpPr>
+          <p:nvPr>
+            <p:ph type="sldImg"/>
+          </p:nvPr>
+        </p:nvSpPr>
+        <p:spPr bwMode="auto">
+          <a:xfrm>
+            <a:off x="387350" y="685800"/>
+            <a:ext cx="6083300" cy="3429000"/>
+          </a:xfrm>
+        </p:spPr>
+      </p:sp>
+      <p:sp>
+        <p:nvSpPr>
+          <p:cNvPr id="337929442" name="Заметки 2">
+            <a:extLst>
+              <a:ext uri="{FF2B5EF4-FFF2-40B4-BE49-F238E27FC236}">
+                <a16:creationId xmlns:a16="http://schemas.microsoft.com/office/drawing/2014/main" id="{12E74146-A96C-C5D6-808B-88730977C6B6}"/>
+              </a:ext>
+            </a:extLst>
+          </p:cNvPr>
+          <p:cNvSpPr>
+            <a:spLocks noGrp="1"/>
+          </p:cNvSpPr>
+          <p:nvPr>
+            <p:ph type="body" idx="1"/>
+          </p:nvPr>
+        </p:nvSpPr>
+        <p:spPr bwMode="auto"/>
+        <p:txBody>
+          <a:bodyPr/>
+          <a:lstStyle/>
+          <a:p>
+            <a:pPr>
+              <a:defRPr/>
+            </a:pPr>
+            <a:r>
+              <a:rPr lang="ru-RU"/>
+              <a:t>Слайд текст+картинка</a:t>
+            </a:r>
+            <a:endParaRPr/>
+          </a:p>
+          <a:p>
+            <a:pPr>
+              <a:defRPr/>
+            </a:pPr>
+            <a:r>
+              <a:rPr lang="ru-RU"/>
+              <a:t>Нажмите на заполнитель с картинкой и подгрузите ваше изображение</a:t>
+            </a:r>
+            <a:endParaRPr/>
+          </a:p>
+          <a:p>
+            <a:pPr>
+              <a:defRPr/>
+            </a:pPr>
+            <a:r>
+              <a:rPr lang="ru-RU"/>
+              <a:t>При необходимости подвижные элементы можно перемешать</a:t>
+            </a:r>
+            <a:r>
+              <a:rPr lang="en-US"/>
+              <a:t> </a:t>
+            </a:r>
+            <a:r>
+              <a:rPr lang="ru-RU"/>
+              <a:t>или дублировать/копировать</a:t>
+            </a:r>
+            <a:endParaRPr/>
+          </a:p>
+          <a:p>
+            <a:pPr>
+              <a:defRPr/>
+            </a:pPr>
+            <a:r>
+              <a:rPr lang="ru-RU"/>
+              <a:t>Ссылка на библиотеку картинок на слайде 7</a:t>
+            </a:r>
+            <a:endParaRPr/>
+          </a:p>
+        </p:txBody>
+      </p:sp>
+    </p:spTree>
+    <p:extLst>
+      <p:ext uri="{BB962C8B-B14F-4D97-AF65-F5344CB8AC3E}">
+        <p14:creationId xmlns:p14="http://schemas.microsoft.com/office/powerpoint/2010/main" val="2352660710"/>
       </p:ext>
     </p:extLst>
   </p:cSld>
@@ -37110,8 +37241,8 @@
         </p:nvSpPr>
         <p:spPr bwMode="auto">
           <a:xfrm>
-            <a:off x="2144408" y="990740"/>
-            <a:ext cx="7406718" cy="996033"/>
+            <a:off x="327155" y="529075"/>
+            <a:ext cx="8545363" cy="1919363"/>
           </a:xfrm>
           <a:prstGeom prst="rect">
             <a:avLst/>
@@ -37335,10 +37466,19 @@
               <a:defRPr/>
             </a:pPr>
             <a:r>
-              <a:rPr lang="ru-RU" sz="6000" b="1" dirty="0"/>
+              <a:rPr lang="en-US" sz="6000" b="1" dirty="0"/>
+              <a:t>Open Closed Principle</a:t>
+            </a:r>
+          </a:p>
+          <a:p>
+            <a:pPr>
+              <a:defRPr/>
+            </a:pPr>
+            <a:r>
+              <a:rPr lang="ru-RU" sz="4000" b="1" dirty="0"/>
               <a:t>Условие</a:t>
             </a:r>
-            <a:endParaRPr dirty="0"/>
+            <a:endParaRPr sz="4000" dirty="0"/>
           </a:p>
         </p:txBody>
       </p:sp>
@@ -37485,6 +37625,42 @@
           </a:p>
         </p:txBody>
       </p:sp>
+      <p:pic>
+        <p:nvPicPr>
+          <p:cNvPr id="3" name="Рисунок 2" descr="Изображение выглядит как текст, снимок экрана, программное обеспечение, Мультимедийное программное обеспечение&#10;&#10;Содержимое, созданное искусственным интеллектом, может быть неверным.">
+            <a:extLst>
+              <a:ext uri="{FF2B5EF4-FFF2-40B4-BE49-F238E27FC236}">
+                <a16:creationId xmlns:a16="http://schemas.microsoft.com/office/drawing/2014/main" id="{2A94BA1E-217B-46E4-1DD3-AE8A11E0CCF3}"/>
+              </a:ext>
+            </a:extLst>
+          </p:cNvPr>
+          <p:cNvPicPr>
+            <a:picLocks noChangeAspect="1"/>
+          </p:cNvPicPr>
+          <p:nvPr/>
+        </p:nvPicPr>
+        <p:blipFill>
+          <a:blip r:embed="rId3">
+            <a:extLst>
+              <a:ext uri="{28A0092B-C50C-407E-A947-70E740481C1C}">
+                <a14:useLocalDpi xmlns:a14="http://schemas.microsoft.com/office/drawing/2010/main" val="0"/>
+              </a:ext>
+            </a:extLst>
+          </a:blip>
+          <a:stretch>
+            <a:fillRect/>
+          </a:stretch>
+        </p:blipFill>
+        <p:spPr>
+          <a:xfrm>
+            <a:off x="4378778" y="3333292"/>
+            <a:ext cx="12123964" cy="7199768"/>
+          </a:xfrm>
+          <a:prstGeom prst="rect">
+            <a:avLst/>
+          </a:prstGeom>
+        </p:spPr>
+      </p:pic>
     </p:spTree>
     <p:extLst>
       <p:ext uri="{BB962C8B-B14F-4D97-AF65-F5344CB8AC3E}">
@@ -38022,8 +38198,8 @@
         </p:nvSpPr>
         <p:spPr bwMode="auto">
           <a:xfrm>
-            <a:off x="4390971" y="5580062"/>
-            <a:ext cx="13355506" cy="2345257"/>
+            <a:off x="10965943" y="3815703"/>
+            <a:ext cx="8308122" cy="2985433"/>
           </a:xfrm>
           <a:prstGeom prst="rect">
             <a:avLst/>
@@ -38099,21 +38275,69 @@
           <a:p>
             <a:r>
               <a:rPr lang="ru-RU" b="1" dirty="0"/>
-              <a:t>Сюда проблемные места (лучше скринами) и что с ними не так </a:t>
+              <a:t>Проблемные места</a:t>
             </a:r>
-            <a:endParaRPr lang="ru-RU" dirty="0"/>
+            <a:r>
+              <a:rPr lang="en-US" b="1" dirty="0"/>
+              <a:t>: </a:t>
+            </a:r>
           </a:p>
           <a:p>
             <a:pPr marL="514350" indent="-514350">
               <a:buAutoNum type="arabicPeriod"/>
             </a:pPr>
-            <a:endParaRPr lang="ru-RU" dirty="0"/>
-          </a:p>
-          <a:p>
-            <a:endParaRPr lang="ru-RU" dirty="0"/>
+            <a:r>
+              <a:rPr lang="ru-RU" b="1" dirty="0"/>
+              <a:t>Возможны только 3 вида отправки</a:t>
+            </a:r>
+          </a:p>
+          <a:p>
+            <a:pPr marL="514350" indent="-514350">
+              <a:buAutoNum type="arabicPeriod"/>
+            </a:pPr>
+            <a:r>
+              <a:rPr lang="ru-RU" b="1" dirty="0"/>
+              <a:t>Нельзя добавить другие виды без изменения внутренности класса</a:t>
+            </a:r>
           </a:p>
         </p:txBody>
       </p:sp>
+      <p:pic>
+        <p:nvPicPr>
+          <p:cNvPr id="2" name="Рисунок 1" descr="Изображение выглядит как текст, снимок экрана, программное обеспечение, Мультимедийное программное обеспечение&#10;&#10;Содержимое, созданное искусственным интеллектом, может быть неверным.">
+            <a:extLst>
+              <a:ext uri="{FF2B5EF4-FFF2-40B4-BE49-F238E27FC236}">
+                <a16:creationId xmlns:a16="http://schemas.microsoft.com/office/drawing/2014/main" id="{2CDD141F-C767-DBCD-3160-93F6DD2C951D}"/>
+              </a:ext>
+            </a:extLst>
+          </p:cNvPr>
+          <p:cNvPicPr>
+            <a:picLocks noChangeAspect="1"/>
+          </p:cNvPicPr>
+          <p:nvPr/>
+        </p:nvPicPr>
+        <p:blipFill>
+          <a:blip r:embed="rId3">
+            <a:extLst>
+              <a:ext uri="{28A0092B-C50C-407E-A947-70E740481C1C}">
+                <a14:useLocalDpi xmlns:a14="http://schemas.microsoft.com/office/drawing/2010/main" val="0"/>
+              </a:ext>
+            </a:extLst>
+          </a:blip>
+          <a:stretch>
+            <a:fillRect/>
+          </a:stretch>
+        </p:blipFill>
+        <p:spPr bwMode="auto">
+          <a:xfrm>
+            <a:off x="525235" y="3815703"/>
+            <a:ext cx="9891409" cy="5873974"/>
+          </a:xfrm>
+          <a:prstGeom prst="rect">
+            <a:avLst/>
+          </a:prstGeom>
+        </p:spPr>
+      </p:pic>
     </p:spTree>
     <p:extLst>
       <p:ext uri="{BB962C8B-B14F-4D97-AF65-F5344CB8AC3E}">
@@ -38637,12 +38861,240 @@
           </a:p>
         </p:txBody>
       </p:sp>
+      <p:pic>
+        <p:nvPicPr>
+          <p:cNvPr id="9" name="Рисунок 8" descr="Изображение выглядит как текст, снимок экрана, программное обеспечение&#10;&#10;Содержимое, созданное искусственным интеллектом, может быть неверным.">
+            <a:extLst>
+              <a:ext uri="{FF2B5EF4-FFF2-40B4-BE49-F238E27FC236}">
+                <a16:creationId xmlns:a16="http://schemas.microsoft.com/office/drawing/2014/main" id="{9CA98BB8-11F6-7E58-8EE3-4EE87E1AB5BA}"/>
+              </a:ext>
+            </a:extLst>
+          </p:cNvPr>
+          <p:cNvPicPr>
+            <a:picLocks noChangeAspect="1"/>
+          </p:cNvPicPr>
+          <p:nvPr/>
+        </p:nvPicPr>
+        <p:blipFill>
+          <a:blip r:embed="rId3">
+            <a:extLst>
+              <a:ext uri="{28A0092B-C50C-407E-A947-70E740481C1C}">
+                <a14:useLocalDpi xmlns:a14="http://schemas.microsoft.com/office/drawing/2010/main" val="0"/>
+              </a:ext>
+            </a:extLst>
+          </a:blip>
+          <a:stretch>
+            <a:fillRect/>
+          </a:stretch>
+        </p:blipFill>
+        <p:spPr>
+          <a:xfrm>
+            <a:off x="7383373" y="414341"/>
+            <a:ext cx="11500409" cy="9962137"/>
+          </a:xfrm>
+          <a:prstGeom prst="rect">
+            <a:avLst/>
+          </a:prstGeom>
+        </p:spPr>
+      </p:pic>
+    </p:spTree>
+    <p:extLst>
+      <p:ext uri="{BB962C8B-B14F-4D97-AF65-F5344CB8AC3E}">
+        <p14:creationId xmlns:p14="http://schemas.microsoft.com/office/powerpoint/2010/main" val="124262260"/>
+      </p:ext>
+    </p:extLst>
+  </p:cSld>
+  <p:clrMapOvr>
+    <a:masterClrMapping/>
+  </p:clrMapOvr>
+</p:sld>
+</file>
+
+<file path=ppt/slides/slide9.xml><?xml version="1.0" encoding="utf-8"?>
+<p:sld xmlns:a="http://schemas.openxmlformats.org/drawingml/2006/main" xmlns:r="http://schemas.openxmlformats.org/officeDocument/2006/relationships" xmlns:p="http://schemas.openxmlformats.org/presentationml/2006/main" showMasterPhAnim="0">
+  <p:cSld>
+    <p:spTree>
+      <p:nvGrpSpPr>
+        <p:cNvPr id="1" name="">
+          <a:extLst>
+            <a:ext uri="{FF2B5EF4-FFF2-40B4-BE49-F238E27FC236}">
+              <a16:creationId xmlns:a16="http://schemas.microsoft.com/office/drawing/2014/main" id="{75583388-8A2A-4985-AC51-0EA8B2916FCD}"/>
+            </a:ext>
+          </a:extLst>
+        </p:cNvPr>
+        <p:cNvGrpSpPr/>
+        <p:nvPr/>
+      </p:nvGrpSpPr>
+      <p:grpSpPr bwMode="auto">
+        <a:xfrm>
+          <a:off x="0" y="0"/>
+          <a:ext cx="0" cy="0"/>
+          <a:chOff x="0" y="0"/>
+          <a:chExt cx="0" cy="0"/>
+        </a:xfrm>
+      </p:grpSpPr>
       <p:sp>
         <p:nvSpPr>
-          <p:cNvPr id="4" name="TextBox 3">
+          <p:cNvPr id="322713659" name="Прямоугольник с одним усеченным и одним скругленным углом 16">
             <a:extLst>
               <a:ext uri="{FF2B5EF4-FFF2-40B4-BE49-F238E27FC236}">
-                <a16:creationId xmlns:a16="http://schemas.microsoft.com/office/drawing/2014/main" id="{D625BFAC-73C3-70E3-831E-11D8B9DBF7CC}"/>
+                <a16:creationId xmlns:a16="http://schemas.microsoft.com/office/drawing/2014/main" id="{AA3E176C-8E70-62CE-38AC-926256F59C59}"/>
+              </a:ext>
+            </a:extLst>
+          </p:cNvPr>
+          <p:cNvSpPr/>
+          <p:nvPr/>
+        </p:nvSpPr>
+        <p:spPr bwMode="auto">
+          <a:xfrm rot="10799956">
+            <a:off x="0" y="-6777"/>
+            <a:ext cx="9199674" cy="2991069"/>
+          </a:xfrm>
+          <a:custGeom>
+            <a:avLst/>
+            <a:gdLst>
+              <a:gd name="connsiteX0" fmla="*/ 1394951 w 9199674"/>
+              <a:gd name="connsiteY0" fmla="*/ 0 h 2789902"/>
+              <a:gd name="connsiteX1" fmla="*/ 9199674 w 9199674"/>
+              <a:gd name="connsiteY1" fmla="*/ 0 h 2789902"/>
+              <a:gd name="connsiteX2" fmla="*/ 9199674 w 9199674"/>
+              <a:gd name="connsiteY2" fmla="*/ 0 h 2789902"/>
+              <a:gd name="connsiteX3" fmla="*/ 9199674 w 9199674"/>
+              <a:gd name="connsiteY3" fmla="*/ 2789902 h 2789902"/>
+              <a:gd name="connsiteX4" fmla="*/ 0 w 9199674"/>
+              <a:gd name="connsiteY4" fmla="*/ 2789902 h 2789902"/>
+              <a:gd name="connsiteX5" fmla="*/ 0 w 9199674"/>
+              <a:gd name="connsiteY5" fmla="*/ 1394951 h 2789902"/>
+              <a:gd name="connsiteX6" fmla="*/ 1394951 w 9199674"/>
+              <a:gd name="connsiteY6" fmla="*/ 0 h 2789902"/>
+              <a:gd name="connsiteX0" fmla="*/ 1394951 w 9199674"/>
+              <a:gd name="connsiteY0" fmla="*/ 0 h 2991070"/>
+              <a:gd name="connsiteX1" fmla="*/ 9199674 w 9199674"/>
+              <a:gd name="connsiteY1" fmla="*/ 0 h 2991070"/>
+              <a:gd name="connsiteX2" fmla="*/ 9199674 w 9199674"/>
+              <a:gd name="connsiteY2" fmla="*/ 0 h 2991070"/>
+              <a:gd name="connsiteX3" fmla="*/ 9199674 w 9199674"/>
+              <a:gd name="connsiteY3" fmla="*/ 2991070 h 2991070"/>
+              <a:gd name="connsiteX4" fmla="*/ 0 w 9199674"/>
+              <a:gd name="connsiteY4" fmla="*/ 2789902 h 2991070"/>
+              <a:gd name="connsiteX5" fmla="*/ 0 w 9199674"/>
+              <a:gd name="connsiteY5" fmla="*/ 1394951 h 2991070"/>
+              <a:gd name="connsiteX6" fmla="*/ 1394951 w 9199674"/>
+              <a:gd name="connsiteY6" fmla="*/ 0 h 2991070"/>
+              <a:gd name="connsiteX0" fmla="*/ 1394951 w 9199674"/>
+              <a:gd name="connsiteY0" fmla="*/ 0 h 2991070"/>
+              <a:gd name="connsiteX1" fmla="*/ 9199674 w 9199674"/>
+              <a:gd name="connsiteY1" fmla="*/ 0 h 2991070"/>
+              <a:gd name="connsiteX2" fmla="*/ 9199674 w 9199674"/>
+              <a:gd name="connsiteY2" fmla="*/ 0 h 2991070"/>
+              <a:gd name="connsiteX3" fmla="*/ 9199674 w 9199674"/>
+              <a:gd name="connsiteY3" fmla="*/ 2991070 h 2991070"/>
+              <a:gd name="connsiteX4" fmla="*/ 0 w 9199674"/>
+              <a:gd name="connsiteY4" fmla="*/ 2991070 h 2991070"/>
+              <a:gd name="connsiteX5" fmla="*/ 0 w 9199674"/>
+              <a:gd name="connsiteY5" fmla="*/ 1394951 h 2991070"/>
+              <a:gd name="connsiteX6" fmla="*/ 1394951 w 9199674"/>
+              <a:gd name="connsiteY6" fmla="*/ 0 h 2991070"/>
+            </a:gdLst>
+            <a:ahLst/>
+            <a:cxnLst>
+              <a:cxn ang="0">
+                <a:pos x="connsiteX0" y="connsiteY0"/>
+              </a:cxn>
+              <a:cxn ang="0">
+                <a:pos x="connsiteX1" y="connsiteY1"/>
+              </a:cxn>
+              <a:cxn ang="0">
+                <a:pos x="connsiteX2" y="connsiteY2"/>
+              </a:cxn>
+              <a:cxn ang="0">
+                <a:pos x="connsiteX3" y="connsiteY3"/>
+              </a:cxn>
+              <a:cxn ang="0">
+                <a:pos x="connsiteX4" y="connsiteY4"/>
+              </a:cxn>
+              <a:cxn ang="0">
+                <a:pos x="connsiteX5" y="connsiteY5"/>
+              </a:cxn>
+              <a:cxn ang="0">
+                <a:pos x="connsiteX6" y="connsiteY6"/>
+              </a:cxn>
+            </a:cxnLst>
+            <a:rect l="l" t="t" r="r" b="b"/>
+            <a:pathLst>
+              <a:path w="9199674" h="2991070" extrusionOk="0">
+                <a:moveTo>
+                  <a:pt x="1394951" y="0"/>
+                </a:moveTo>
+                <a:lnTo>
+                  <a:pt x="9199674" y="0"/>
+                </a:lnTo>
+                <a:lnTo>
+                  <a:pt x="9199674" y="0"/>
+                </a:lnTo>
+                <a:lnTo>
+                  <a:pt x="9199674" y="2991070"/>
+                </a:lnTo>
+                <a:lnTo>
+                  <a:pt x="0" y="2991070"/>
+                </a:lnTo>
+                <a:lnTo>
+                  <a:pt x="0" y="1394951"/>
+                </a:lnTo>
+                <a:cubicBezTo>
+                  <a:pt x="0" y="624541"/>
+                  <a:pt x="624541" y="0"/>
+                  <a:pt x="1394951" y="0"/>
+                </a:cubicBezTo>
+                <a:close/>
+              </a:path>
+            </a:pathLst>
+          </a:custGeom>
+          <a:solidFill>
+            <a:schemeClr val="accent1">
+              <a:alpha val="90000"/>
+            </a:schemeClr>
+          </a:solidFill>
+          <a:ln w="12700" cap="flat">
+            <a:solidFill>
+              <a:schemeClr val="accent1"/>
+            </a:solidFill>
+            <a:prstDash val="solid"/>
+            <a:miter lim="800000"/>
+          </a:ln>
+          <a:effectLst/>
+        </p:spPr>
+        <p:style>
+          <a:lnRef idx="0">
+            <a:srgbClr val="000000"/>
+          </a:lnRef>
+          <a:fillRef idx="0">
+            <a:srgbClr val="000000"/>
+          </a:fillRef>
+          <a:effectRef idx="0">
+            <a:srgbClr val="000000"/>
+          </a:effectRef>
+          <a:fontRef idx="none"/>
+        </p:style>
+        <p:txBody>
+          <a:bodyPr rot="0" spcFirstLastPara="1" vertOverflow="overflow" horzOverflow="overflow" vert="horz" wrap="square" lIns="44994" tIns="44994" rIns="44994" bIns="44994" numCol="1" spcCol="38098" rtlCol="0" anchor="ctr">
+            <a:noAutofit/>
+          </a:bodyPr>
+          <a:lstStyle/>
+          <a:p>
+            <a:pPr>
+              <a:defRPr/>
+            </a:pPr>
+            <a:endParaRPr lang="ru-RU" sz="2350"/>
+          </a:p>
+        </p:txBody>
+      </p:sp>
+      <p:sp>
+        <p:nvSpPr>
+          <p:cNvPr id="1184460363" name="Текст 17">
+            <a:extLst>
+              <a:ext uri="{FF2B5EF4-FFF2-40B4-BE49-F238E27FC236}">
+                <a16:creationId xmlns:a16="http://schemas.microsoft.com/office/drawing/2014/main" id="{E408C6F0-C712-A174-CA18-54CD07ECD1A6}"/>
               </a:ext>
             </a:extLst>
           </p:cNvPr>
@@ -38651,8 +39103,291 @@
         </p:nvSpPr>
         <p:spPr bwMode="auto">
           <a:xfrm>
-            <a:off x="3672047" y="5580062"/>
-            <a:ext cx="15134270" cy="4727448"/>
+            <a:off x="2002168" y="813555"/>
+            <a:ext cx="7406718" cy="996033"/>
+          </a:xfrm>
+          <a:prstGeom prst="rect">
+            <a:avLst/>
+          </a:prstGeom>
+        </p:spPr>
+        <p:txBody>
+          <a:bodyPr wrap="square" lIns="36000" tIns="36000" rIns="36000" bIns="36000">
+            <a:spAutoFit/>
+          </a:bodyPr>
+          <a:lstStyle>
+            <a:lvl1pPr marL="0" marR="0" indent="11441" algn="l" defTabSz="411477">
+              <a:lnSpc>
+                <a:spcPct val="100000"/>
+              </a:lnSpc>
+              <a:spcBef>
+                <a:spcPts val="2398"/>
+              </a:spcBef>
+              <a:spcAft>
+                <a:spcPts val="0"/>
+              </a:spcAft>
+              <a:buClrTx/>
+              <a:buSzPct val="100000"/>
+              <a:buFont typeface="Wingdings"/>
+              <a:buNone/>
+              <a:defRPr sz="5400" b="0" i="0" u="none" strike="noStrike" cap="none" spc="0">
+                <a:solidFill>
+                  <a:srgbClr val="000000"/>
+                </a:solidFill>
+                <a:latin typeface="Tinkoff Sans"/>
+                <a:ea typeface="Tinkoff Sans"/>
+                <a:cs typeface="Tinkoff Sans"/>
+              </a:defRPr>
+            </a:lvl1pPr>
+            <a:lvl2pPr marL="720000" marR="0" indent="-445131" algn="l" defTabSz="1509580">
+              <a:lnSpc>
+                <a:spcPct val="118000"/>
+              </a:lnSpc>
+              <a:spcBef>
+                <a:spcPts val="2398"/>
+              </a:spcBef>
+              <a:spcAft>
+                <a:spcPts val="0"/>
+              </a:spcAft>
+              <a:buClrTx/>
+              <a:buSzPct val="100000"/>
+              <a:buFont typeface="Wingdings"/>
+              <a:buChar char="§"/>
+              <a:defRPr sz="2400" b="0" i="0" u="none" strike="noStrike" cap="none" spc="0">
+                <a:solidFill>
+                  <a:srgbClr val="000000"/>
+                </a:solidFill>
+                <a:latin typeface="Tinkoff Sans"/>
+                <a:ea typeface="Tinkoff Sans"/>
+                <a:cs typeface="Tinkoff Sans"/>
+              </a:defRPr>
+            </a:lvl2pPr>
+            <a:lvl3pPr marL="1440000" marR="0" indent="-526065" algn="l" defTabSz="1509580">
+              <a:lnSpc>
+                <a:spcPct val="118000"/>
+              </a:lnSpc>
+              <a:spcBef>
+                <a:spcPts val="2398"/>
+              </a:spcBef>
+              <a:spcAft>
+                <a:spcPts val="0"/>
+              </a:spcAft>
+              <a:buClrTx/>
+              <a:buSzPct val="100000"/>
+              <a:buFont typeface="Wingdings"/>
+              <a:buChar char="§"/>
+              <a:defRPr sz="2400" b="0" i="0" u="none" strike="noStrike" cap="none" spc="0">
+                <a:solidFill>
+                  <a:srgbClr val="000000"/>
+                </a:solidFill>
+                <a:latin typeface="Tinkoff Sans"/>
+                <a:ea typeface="Tinkoff Sans"/>
+                <a:cs typeface="Tinkoff Sans"/>
+              </a:defRPr>
+            </a:lvl3pPr>
+            <a:lvl4pPr marL="2160000" marR="0" indent="-598626" algn="l" defTabSz="1509580">
+              <a:lnSpc>
+                <a:spcPct val="118000"/>
+              </a:lnSpc>
+              <a:spcBef>
+                <a:spcPts val="2398"/>
+              </a:spcBef>
+              <a:spcAft>
+                <a:spcPts val="0"/>
+              </a:spcAft>
+              <a:buClrTx/>
+              <a:buSzPct val="100000"/>
+              <a:buFont typeface="Wingdings"/>
+              <a:buChar char="§"/>
+              <a:defRPr sz="2400" b="0" i="0" u="none" strike="noStrike" cap="none" spc="0">
+                <a:solidFill>
+                  <a:srgbClr val="000000"/>
+                </a:solidFill>
+                <a:latin typeface="Tinkoff Sans"/>
+                <a:ea typeface="Tinkoff Sans"/>
+                <a:cs typeface="Tinkoff Sans"/>
+              </a:defRPr>
+            </a:lvl4pPr>
+            <a:lvl5pPr marL="3617793" marR="0" indent="-598626" algn="l" defTabSz="1509580">
+              <a:lnSpc>
+                <a:spcPct val="118000"/>
+              </a:lnSpc>
+              <a:spcBef>
+                <a:spcPts val="2398"/>
+              </a:spcBef>
+              <a:spcAft>
+                <a:spcPts val="0"/>
+              </a:spcAft>
+              <a:buClrTx/>
+              <a:buSzPct val="100000"/>
+              <a:buFont typeface="Wingdings"/>
+              <a:buChar char="§"/>
+              <a:defRPr sz="2400" b="0" i="0" u="none" strike="noStrike" cap="none" spc="0">
+                <a:solidFill>
+                  <a:srgbClr val="000000"/>
+                </a:solidFill>
+                <a:latin typeface="Tinkoff Sans"/>
+                <a:ea typeface="Tinkoff Sans"/>
+                <a:cs typeface="Tinkoff Sans"/>
+              </a:defRPr>
+            </a:lvl5pPr>
+            <a:lvl6pPr marL="4372583" marR="0" indent="-598626" algn="l" defTabSz="1509580">
+              <a:lnSpc>
+                <a:spcPct val="90000"/>
+              </a:lnSpc>
+              <a:spcBef>
+                <a:spcPts val="1598"/>
+              </a:spcBef>
+              <a:spcAft>
+                <a:spcPts val="0"/>
+              </a:spcAft>
+              <a:buClrTx/>
+              <a:buSzPct val="100000"/>
+              <a:buFont typeface="Arial"/>
+              <a:buChar char="•"/>
+              <a:defRPr sz="4600" b="0" i="0" u="none" strike="noStrike" cap="none" spc="0">
+                <a:solidFill>
+                  <a:srgbClr val="000000"/>
+                </a:solidFill>
+                <a:latin typeface="Tinkoff Sans"/>
+                <a:ea typeface="Tinkoff Sans"/>
+                <a:cs typeface="Tinkoff Sans"/>
+              </a:defRPr>
+            </a:lvl6pPr>
+            <a:lvl7pPr marL="5127375" marR="0" indent="-598626" algn="l" defTabSz="1509580">
+              <a:lnSpc>
+                <a:spcPct val="90000"/>
+              </a:lnSpc>
+              <a:spcBef>
+                <a:spcPts val="1598"/>
+              </a:spcBef>
+              <a:spcAft>
+                <a:spcPts val="0"/>
+              </a:spcAft>
+              <a:buClrTx/>
+              <a:buSzPct val="100000"/>
+              <a:buFont typeface="Arial"/>
+              <a:buChar char="•"/>
+              <a:defRPr sz="4600" b="0" i="0" u="none" strike="noStrike" cap="none" spc="0">
+                <a:solidFill>
+                  <a:srgbClr val="000000"/>
+                </a:solidFill>
+                <a:latin typeface="Tinkoff Sans"/>
+                <a:ea typeface="Tinkoff Sans"/>
+                <a:cs typeface="Tinkoff Sans"/>
+              </a:defRPr>
+            </a:lvl7pPr>
+            <a:lvl8pPr marL="5882166" marR="0" indent="-598626" algn="l" defTabSz="1509580">
+              <a:lnSpc>
+                <a:spcPct val="90000"/>
+              </a:lnSpc>
+              <a:spcBef>
+                <a:spcPts val="1598"/>
+              </a:spcBef>
+              <a:spcAft>
+                <a:spcPts val="0"/>
+              </a:spcAft>
+              <a:buClrTx/>
+              <a:buSzPct val="100000"/>
+              <a:buFont typeface="Arial"/>
+              <a:buChar char="•"/>
+              <a:defRPr sz="4600" b="0" i="0" u="none" strike="noStrike" cap="none" spc="0">
+                <a:solidFill>
+                  <a:srgbClr val="000000"/>
+                </a:solidFill>
+                <a:latin typeface="Tinkoff Sans"/>
+                <a:ea typeface="Tinkoff Sans"/>
+                <a:cs typeface="Tinkoff Sans"/>
+              </a:defRPr>
+            </a:lvl8pPr>
+            <a:lvl9pPr marL="6636960" marR="0" indent="-598626" algn="l" defTabSz="1509580">
+              <a:lnSpc>
+                <a:spcPct val="90000"/>
+              </a:lnSpc>
+              <a:spcBef>
+                <a:spcPts val="1598"/>
+              </a:spcBef>
+              <a:spcAft>
+                <a:spcPts val="0"/>
+              </a:spcAft>
+              <a:buClrTx/>
+              <a:buSzPct val="100000"/>
+              <a:buFont typeface="Arial"/>
+              <a:buChar char="•"/>
+              <a:defRPr sz="4600" b="0" i="0" u="none" strike="noStrike" cap="none" spc="0">
+                <a:solidFill>
+                  <a:srgbClr val="000000"/>
+                </a:solidFill>
+                <a:latin typeface="Tinkoff Sans"/>
+                <a:ea typeface="Tinkoff Sans"/>
+                <a:cs typeface="Tinkoff Sans"/>
+              </a:defRPr>
+            </a:lvl9pPr>
+          </a:lstStyle>
+          <a:p>
+            <a:pPr>
+              <a:defRPr/>
+            </a:pPr>
+            <a:r>
+              <a:rPr lang="ru-RU" sz="6000" b="1" dirty="0"/>
+              <a:t>Решения</a:t>
+            </a:r>
+            <a:endParaRPr dirty="0"/>
+          </a:p>
+        </p:txBody>
+      </p:sp>
+      <p:sp>
+        <p:nvSpPr>
+          <p:cNvPr id="87527263" name="Номер слайда 1">
+            <a:extLst>
+              <a:ext uri="{FF2B5EF4-FFF2-40B4-BE49-F238E27FC236}">
+                <a16:creationId xmlns:a16="http://schemas.microsoft.com/office/drawing/2014/main" id="{FCDCAE6C-86AD-CA26-C5A4-077A1EDC6DCD}"/>
+              </a:ext>
+            </a:extLst>
+          </p:cNvPr>
+          <p:cNvSpPr>
+            <a:spLocks noGrp="1"/>
+          </p:cNvSpPr>
+          <p:nvPr>
+            <p:ph type="sldNum" sz="quarter" idx="4"/>
+          </p:nvPr>
+        </p:nvSpPr>
+        <p:spPr bwMode="auto">
+          <a:xfrm>
+            <a:off x="18272124" y="10320336"/>
+            <a:ext cx="1068386" cy="425448"/>
+          </a:xfrm>
+        </p:spPr>
+        <p:txBody>
+          <a:bodyPr/>
+          <a:lstStyle/>
+          <a:p>
+            <a:pPr>
+              <a:defRPr/>
+            </a:pPr>
+            <a:fld id="{A6E9B09B-4F07-3D57-2C6F-4A155C82101B}" type="slidenum">
+              <a:rPr lang="ru-RU"/>
+              <a:t>9</a:t>
+            </a:fld>
+            <a:endParaRPr lang="ru-RU"/>
+          </a:p>
+        </p:txBody>
+      </p:sp>
+      <p:sp>
+        <p:nvSpPr>
+          <p:cNvPr id="3" name="TextBox 2">
+            <a:extLst>
+              <a:ext uri="{FF2B5EF4-FFF2-40B4-BE49-F238E27FC236}">
+                <a16:creationId xmlns:a16="http://schemas.microsoft.com/office/drawing/2014/main" id="{E21F942E-3C99-97E9-BB07-BEE5478C2988}"/>
+              </a:ext>
+            </a:extLst>
+          </p:cNvPr>
+          <p:cNvSpPr txBox="1"/>
+          <p:nvPr/>
+        </p:nvSpPr>
+        <p:spPr bwMode="auto">
+          <a:xfrm>
+            <a:off x="4206240" y="6156960"/>
+            <a:ext cx="184731" cy="361637"/>
           </a:xfrm>
           <a:prstGeom prst="rect">
             <a:avLst/>
@@ -38662,119 +39397,69 @@
             <a:noFill/>
             <a:miter lim="400000"/>
           </a:ln>
-          <a:effectLst/>
-          <a:sp3d/>
         </p:spPr>
         <p:style>
           <a:lnRef idx="0">
-            <a:scrgbClr r="0" g="0" b="0"/>
+            <a:srgbClr val="000000"/>
           </a:lnRef>
           <a:fillRef idx="0">
-            <a:scrgbClr r="0" g="0" b="0"/>
+            <a:srgbClr val="000000"/>
           </a:fillRef>
           <a:effectRef idx="0">
-            <a:scrgbClr r="0" g="0" b="0"/>
+            <a:srgbClr val="000000"/>
           </a:effectRef>
           <a:fontRef idx="none"/>
         </p:style>
         <p:txBody>
-          <a:bodyPr wrap="square" lIns="0" tIns="0" rIns="0" bIns="0" anchor="t">
+          <a:bodyPr wrap="none" rtlCol="0">
             <a:spAutoFit/>
           </a:bodyPr>
-          <a:lstStyle>
-            <a:defPPr marL="0" marR="0" indent="0" algn="l" defTabSz="900060" rtl="0" fontAlgn="auto" latinLnBrk="1" hangingPunct="0">
-              <a:lnSpc>
-                <a:spcPct val="100000"/>
-              </a:lnSpc>
-              <a:spcBef>
-                <a:spcPts val="0"/>
-              </a:spcBef>
-              <a:spcAft>
-                <a:spcPts val="0"/>
-              </a:spcAft>
-              <a:buClrTx/>
-              <a:buSzTx/>
-              <a:buFontTx/>
-              <a:buNone/>
-              <a:tabLst/>
-              <a:defRPr kumimoji="0" lang="ru-RU" sz="1773" b="0" i="0" u="none" strike="noStrike" cap="none" spc="0" normalizeH="0" baseline="0">
-                <a:ln>
-                  <a:noFill/>
-                </a:ln>
-                <a:solidFill>
-                  <a:srgbClr val="000000"/>
-                </a:solidFill>
-                <a:effectLst/>
-                <a:uFillTx/>
-              </a:defRPr>
-            </a:defPPr>
-            <a:lvl1pPr>
-              <a:lnSpc>
-                <a:spcPct val="130000"/>
-              </a:lnSpc>
-              <a:spcAft>
-                <a:spcPts val="1800"/>
-              </a:spcAft>
-              <a:defRPr sz="3200">
-                <a:solidFill>
-                  <a:schemeClr val="bg2">
-                    <a:lumMod val="75000"/>
-                  </a:schemeClr>
-                </a:solidFill>
-                <a:latin typeface="Tinkoff Sans" panose="02000506050000020004" pitchFamily="2" charset="0"/>
-              </a:defRPr>
-            </a:lvl1pPr>
-          </a:lstStyle>
-          <a:p>
-            <a:r>
-              <a:rPr lang="ru-RU" b="1" dirty="0"/>
-              <a:t>Сюда то как вы решили проблемы (скринами) и почему выбрали такое решение</a:t>
-            </a:r>
-            <a:r>
-              <a:rPr lang="en-US" b="1" dirty="0"/>
-              <a:t>. </a:t>
-            </a:r>
-          </a:p>
-          <a:p>
-            <a:r>
-              <a:rPr lang="ru-RU" b="1" dirty="0"/>
-              <a:t>ВАЖНО уметь ответить вопрос ПОЧЕМУ</a:t>
-            </a:r>
-            <a:r>
-              <a:rPr lang="en-US" b="1" dirty="0"/>
-              <a:t>.</a:t>
-            </a:r>
-          </a:p>
-          <a:p>
-            <a:r>
-              <a:rPr lang="ru-RU" b="1" dirty="0"/>
-              <a:t>Можете не успеть все проблемы решить – это </a:t>
-            </a:r>
-            <a:r>
-              <a:rPr lang="ru-RU" b="1" dirty="0" err="1"/>
-              <a:t>ок</a:t>
-            </a:r>
-            <a:r>
-              <a:rPr lang="en-US" b="1" dirty="0"/>
-              <a:t>.</a:t>
-            </a:r>
-            <a:endParaRPr lang="ru-RU" dirty="0"/>
-          </a:p>
-          <a:p>
-            <a:pPr marL="514350" indent="-514350">
-              <a:buAutoNum type="arabicPeriod"/>
-            </a:pPr>
-            <a:endParaRPr lang="ru-RU" dirty="0"/>
-          </a:p>
+          <a:lstStyle/>
           <a:p>
             <a:endParaRPr lang="ru-RU" dirty="0"/>
           </a:p>
         </p:txBody>
       </p:sp>
+      <p:pic>
+        <p:nvPicPr>
+          <p:cNvPr id="7" name="Рисунок 6" descr="Изображение выглядит как текст, снимок экрана, программное обеспечение&#10;&#10;Содержимое, созданное искусственным интеллектом, может быть неверным.">
+            <a:extLst>
+              <a:ext uri="{FF2B5EF4-FFF2-40B4-BE49-F238E27FC236}">
+                <a16:creationId xmlns:a16="http://schemas.microsoft.com/office/drawing/2014/main" id="{FEDAF87E-03D8-2E13-9F0E-88CE3D831409}"/>
+              </a:ext>
+            </a:extLst>
+          </p:cNvPr>
+          <p:cNvPicPr>
+            <a:picLocks noChangeAspect="1"/>
+          </p:cNvPicPr>
+          <p:nvPr/>
+        </p:nvPicPr>
+        <p:blipFill>
+          <a:blip r:embed="rId3">
+            <a:extLst>
+              <a:ext uri="{28A0092B-C50C-407E-A947-70E740481C1C}">
+                <a14:useLocalDpi xmlns:a14="http://schemas.microsoft.com/office/drawing/2010/main" val="0"/>
+              </a:ext>
+            </a:extLst>
+          </a:blip>
+          <a:stretch>
+            <a:fillRect/>
+          </a:stretch>
+        </p:blipFill>
+        <p:spPr>
+          <a:xfrm>
+            <a:off x="6008915" y="422264"/>
+            <a:ext cx="13093245" cy="10323520"/>
+          </a:xfrm>
+          <a:prstGeom prst="rect">
+            <a:avLst/>
+          </a:prstGeom>
+        </p:spPr>
+      </p:pic>
     </p:spTree>
     <p:extLst>
       <p:ext uri="{BB962C8B-B14F-4D97-AF65-F5344CB8AC3E}">
-        <p14:creationId xmlns:p14="http://schemas.microsoft.com/office/powerpoint/2010/main" val="124262260"/>
+        <p14:creationId xmlns:p14="http://schemas.microsoft.com/office/powerpoint/2010/main" val="2768389955"/>
       </p:ext>
     </p:extLst>
   </p:cSld>
